--- a/poster/Predictive Modeling of Root-Zone Variables Using Greenhouse Data - Project 14 V4.pptx
+++ b/poster/Predictive Modeling of Root-Zone Variables Using Greenhouse Data - Project 14 V4.pptx
@@ -257,7 +257,7 @@
             <a:fld id="{0158C5BC-9A70-462C-B28D-9600239EAC64}" type="datetimeFigureOut">
               <a:rPr lang="en-US" smtClean="0"/>
               <a:pPr/>
-              <a:t>6/9/2026</a:t>
+              <a:t>6/10/2026</a:t>
             </a:fld>
             <a:endParaRPr lang="en-US"/>
           </a:p>
@@ -424,7 +424,7 @@
             <a:fld id="{E6CC2317-6751-4CD4-9995-8782DD78E936}" type="datetimeFigureOut">
               <a:rPr lang="en-US" smtClean="0"/>
               <a:pPr/>
-              <a:t>6/9/2026</a:t>
+              <a:t>6/10/2026</a:t>
             </a:fld>
             <a:endParaRPr lang="en-US" dirty="0"/>
           </a:p>
@@ -16312,10 +16312,10 @@
       </p:sp>
       <p:pic>
         <p:nvPicPr>
-          <p:cNvPr id="46" name="תמונה 45">
+          <p:cNvPr id="48" name="תמונה 47">
             <a:extLst>
               <a:ext uri="{FF2B5EF4-FFF2-40B4-BE49-F238E27FC236}">
-                <a16:creationId xmlns:a16="http://schemas.microsoft.com/office/drawing/2014/main" id="{0DE69F8B-B277-BF13-55D1-24DFA47E42EE}"/>
+                <a16:creationId xmlns:a16="http://schemas.microsoft.com/office/drawing/2014/main" id="{5F5E2702-9552-1F99-49DA-25149C04CE57}"/>
               </a:ext>
             </a:extLst>
           </p:cNvPr>
@@ -16332,8 +16332,8 @@
         </p:blipFill>
         <p:spPr>
           <a:xfrm>
-            <a:off x="2249002" y="19785009"/>
-            <a:ext cx="8245995" cy="4727704"/>
+            <a:off x="757856" y="20027698"/>
+            <a:ext cx="11357998" cy="4391759"/>
           </a:xfrm>
           <a:prstGeom prst="rect">
             <a:avLst/>
